--- a/train/TGIS.pptx
+++ b/train/TGIS.pptx
@@ -105,6 +105,11 @@
       </a:defRPr>
     </a:lvl9pPr>
   </p:defaultTextStyle>
+  <p:extLst>
+    <p:ext uri="{EFAFB233-063F-42B5-8137-9DF3F51BA10A}">
+      <p15:sldGuideLst xmlns:p15="http://schemas.microsoft.com/office/powerpoint/2012/main"/>
+    </p:ext>
+  </p:extLst>
 </p:presentation>
 </file>
 
@@ -239,7 +244,7 @@
           <a:p>
             <a:fld id="{5EA2C34D-190E-4510-A06B-2EABE3DB2058}" type="datetimeFigureOut">
               <a:rPr lang="ko-KR" altLang="en-US" smtClean="0"/>
-              <a:t>2026-04-06</a:t>
+              <a:t>2026-04-07</a:t>
             </a:fld>
             <a:endParaRPr lang="ko-KR" altLang="en-US" dirty="0"/>
           </a:p>
@@ -409,7 +414,7 @@
           <a:p>
             <a:fld id="{5EA2C34D-190E-4510-A06B-2EABE3DB2058}" type="datetimeFigureOut">
               <a:rPr lang="ko-KR" altLang="en-US" smtClean="0"/>
-              <a:t>2026-04-06</a:t>
+              <a:t>2026-04-07</a:t>
             </a:fld>
             <a:endParaRPr lang="ko-KR" altLang="en-US" dirty="0"/>
           </a:p>
@@ -589,7 +594,7 @@
           <a:p>
             <a:fld id="{5EA2C34D-190E-4510-A06B-2EABE3DB2058}" type="datetimeFigureOut">
               <a:rPr lang="ko-KR" altLang="en-US" smtClean="0"/>
-              <a:t>2026-04-06</a:t>
+              <a:t>2026-04-07</a:t>
             </a:fld>
             <a:endParaRPr lang="ko-KR" altLang="en-US" dirty="0"/>
           </a:p>
@@ -759,7 +764,7 @@
           <a:p>
             <a:fld id="{5EA2C34D-190E-4510-A06B-2EABE3DB2058}" type="datetimeFigureOut">
               <a:rPr lang="ko-KR" altLang="en-US" smtClean="0"/>
-              <a:t>2026-04-06</a:t>
+              <a:t>2026-04-07</a:t>
             </a:fld>
             <a:endParaRPr lang="ko-KR" altLang="en-US" dirty="0"/>
           </a:p>
@@ -1005,7 +1010,7 @@
           <a:p>
             <a:fld id="{5EA2C34D-190E-4510-A06B-2EABE3DB2058}" type="datetimeFigureOut">
               <a:rPr lang="ko-KR" altLang="en-US" smtClean="0"/>
-              <a:t>2026-04-06</a:t>
+              <a:t>2026-04-07</a:t>
             </a:fld>
             <a:endParaRPr lang="ko-KR" altLang="en-US" dirty="0"/>
           </a:p>
@@ -1237,7 +1242,7 @@
           <a:p>
             <a:fld id="{5EA2C34D-190E-4510-A06B-2EABE3DB2058}" type="datetimeFigureOut">
               <a:rPr lang="ko-KR" altLang="en-US" smtClean="0"/>
-              <a:t>2026-04-06</a:t>
+              <a:t>2026-04-07</a:t>
             </a:fld>
             <a:endParaRPr lang="ko-KR" altLang="en-US" dirty="0"/>
           </a:p>
@@ -1604,7 +1609,7 @@
           <a:p>
             <a:fld id="{5EA2C34D-190E-4510-A06B-2EABE3DB2058}" type="datetimeFigureOut">
               <a:rPr lang="ko-KR" altLang="en-US" smtClean="0"/>
-              <a:t>2026-04-06</a:t>
+              <a:t>2026-04-07</a:t>
             </a:fld>
             <a:endParaRPr lang="ko-KR" altLang="en-US" dirty="0"/>
           </a:p>
@@ -1722,7 +1727,7 @@
           <a:p>
             <a:fld id="{5EA2C34D-190E-4510-A06B-2EABE3DB2058}" type="datetimeFigureOut">
               <a:rPr lang="ko-KR" altLang="en-US" smtClean="0"/>
-              <a:t>2026-04-06</a:t>
+              <a:t>2026-04-07</a:t>
             </a:fld>
             <a:endParaRPr lang="ko-KR" altLang="en-US" dirty="0"/>
           </a:p>
@@ -1817,7 +1822,7 @@
           <a:p>
             <a:fld id="{5EA2C34D-190E-4510-A06B-2EABE3DB2058}" type="datetimeFigureOut">
               <a:rPr lang="ko-KR" altLang="en-US" smtClean="0"/>
-              <a:t>2026-04-06</a:t>
+              <a:t>2026-04-07</a:t>
             </a:fld>
             <a:endParaRPr lang="ko-KR" altLang="en-US" dirty="0"/>
           </a:p>
@@ -2094,7 +2099,7 @@
           <a:p>
             <a:fld id="{5EA2C34D-190E-4510-A06B-2EABE3DB2058}" type="datetimeFigureOut">
               <a:rPr lang="ko-KR" altLang="en-US" smtClean="0"/>
-              <a:t>2026-04-06</a:t>
+              <a:t>2026-04-07</a:t>
             </a:fld>
             <a:endParaRPr lang="ko-KR" altLang="en-US" dirty="0"/>
           </a:p>
@@ -2351,7 +2356,7 @@
           <a:p>
             <a:fld id="{5EA2C34D-190E-4510-A06B-2EABE3DB2058}" type="datetimeFigureOut">
               <a:rPr lang="ko-KR" altLang="en-US" smtClean="0"/>
-              <a:t>2026-04-06</a:t>
+              <a:t>2026-04-07</a:t>
             </a:fld>
             <a:endParaRPr lang="ko-KR" altLang="en-US" dirty="0"/>
           </a:p>
@@ -2564,7 +2569,7 @@
           <a:p>
             <a:fld id="{5EA2C34D-190E-4510-A06B-2EABE3DB2058}" type="datetimeFigureOut">
               <a:rPr lang="ko-KR" altLang="en-US" smtClean="0"/>
-              <a:t>2026-04-06</a:t>
+              <a:t>2026-04-07</a:t>
             </a:fld>
             <a:endParaRPr lang="ko-KR" altLang="en-US" dirty="0"/>
           </a:p>
@@ -3695,60 +3700,6 @@
       </p:sp>
       <p:sp>
         <p:nvSpPr>
-          <p:cNvPr id="19" name="직사각형 18">
-            <a:extLst>
-              <a:ext uri="{FF2B5EF4-FFF2-40B4-BE49-F238E27FC236}">
-                <a16:creationId xmlns:a16="http://schemas.microsoft.com/office/drawing/2014/main" id="{6D20E140-5008-5252-C7E1-B3A4C832C4A2}"/>
-              </a:ext>
-            </a:extLst>
-          </p:cNvPr>
-          <p:cNvSpPr/>
-          <p:nvPr/>
-        </p:nvSpPr>
-        <p:spPr>
-          <a:xfrm>
-            <a:off x="-67734" y="5829299"/>
-            <a:ext cx="9279466" cy="499534"/>
-          </a:xfrm>
-          <a:prstGeom prst="rect">
-            <a:avLst/>
-          </a:prstGeom>
-          <a:solidFill>
-            <a:srgbClr val="3896D0"/>
-          </a:solidFill>
-          <a:ln>
-            <a:solidFill>
-              <a:schemeClr val="bg1"/>
-            </a:solidFill>
-          </a:ln>
-        </p:spPr>
-        <p:style>
-          <a:lnRef idx="2">
-            <a:schemeClr val="accent1">
-              <a:shade val="15000"/>
-            </a:schemeClr>
-          </a:lnRef>
-          <a:fillRef idx="1">
-            <a:schemeClr val="accent1"/>
-          </a:fillRef>
-          <a:effectRef idx="0">
-            <a:schemeClr val="accent1"/>
-          </a:effectRef>
-          <a:fontRef idx="minor">
-            <a:schemeClr val="lt1"/>
-          </a:fontRef>
-        </p:style>
-        <p:txBody>
-          <a:bodyPr rtlCol="0" anchor="ctr"/>
-          <a:lstStyle/>
-          <a:p>
-            <a:pPr algn="ctr"/>
-            <a:endParaRPr lang="ko-KR" altLang="en-US"/>
-          </a:p>
-        </p:txBody>
-      </p:sp>
-      <p:sp>
-        <p:nvSpPr>
           <p:cNvPr id="20" name="직사각형 19">
             <a:extLst>
               <a:ext uri="{FF2B5EF4-FFF2-40B4-BE49-F238E27FC236}">
@@ -8384,8 +8335,8 @@
         </p:nvSpPr>
         <p:spPr>
           <a:xfrm rot="2700000">
-            <a:off x="4652989" y="1072278"/>
-            <a:ext cx="112395" cy="118322"/>
+            <a:off x="4657281" y="1072236"/>
+            <a:ext cx="108000" cy="108000"/>
           </a:xfrm>
           <a:prstGeom prst="rect">
             <a:avLst/>
@@ -8436,8 +8387,8 @@
         </p:nvSpPr>
         <p:spPr>
           <a:xfrm rot="2700000">
-            <a:off x="4951757" y="1073310"/>
-            <a:ext cx="112395" cy="118322"/>
+            <a:off x="4956049" y="1073268"/>
+            <a:ext cx="108000" cy="108000"/>
           </a:xfrm>
           <a:prstGeom prst="rect">
             <a:avLst/>
@@ -8488,8 +8439,8 @@
         </p:nvSpPr>
         <p:spPr>
           <a:xfrm rot="2700000">
-            <a:off x="3508348" y="1072277"/>
-            <a:ext cx="112395" cy="118322"/>
+            <a:off x="3512640" y="1072235"/>
+            <a:ext cx="108000" cy="108000"/>
           </a:xfrm>
           <a:prstGeom prst="rect">
             <a:avLst/>
@@ -8540,8 +8491,8 @@
         </p:nvSpPr>
         <p:spPr>
           <a:xfrm rot="2700000">
-            <a:off x="3807116" y="1073309"/>
-            <a:ext cx="112395" cy="118322"/>
+            <a:off x="3811408" y="1073267"/>
+            <a:ext cx="108000" cy="108000"/>
           </a:xfrm>
           <a:prstGeom prst="rect">
             <a:avLst/>
@@ -8592,8 +8543,8 @@
         </p:nvSpPr>
         <p:spPr>
           <a:xfrm rot="2700000">
-            <a:off x="6935180" y="1075119"/>
-            <a:ext cx="112395" cy="118322"/>
+            <a:off x="6939472" y="1075077"/>
+            <a:ext cx="108000" cy="108000"/>
           </a:xfrm>
           <a:prstGeom prst="rect">
             <a:avLst/>
@@ -8644,8 +8595,8 @@
         </p:nvSpPr>
         <p:spPr>
           <a:xfrm rot="2700000">
-            <a:off x="7233948" y="1076151"/>
-            <a:ext cx="112395" cy="118322"/>
+            <a:off x="7238240" y="1076109"/>
+            <a:ext cx="108000" cy="108000"/>
           </a:xfrm>
           <a:prstGeom prst="rect">
             <a:avLst/>
@@ -8950,6 +8901,1101 @@
             <a:srgbClr val="3896D0"/>
           </a:solidFill>
           <a:ln>
+            <a:solidFill>
+              <a:schemeClr val="bg1"/>
+            </a:solidFill>
+          </a:ln>
+        </p:spPr>
+        <p:style>
+          <a:lnRef idx="2">
+            <a:schemeClr val="accent1">
+              <a:shade val="15000"/>
+            </a:schemeClr>
+          </a:lnRef>
+          <a:fillRef idx="1">
+            <a:schemeClr val="accent1"/>
+          </a:fillRef>
+          <a:effectRef idx="0">
+            <a:schemeClr val="accent1"/>
+          </a:effectRef>
+          <a:fontRef idx="minor">
+            <a:schemeClr val="lt1"/>
+          </a:fontRef>
+        </p:style>
+        <p:txBody>
+          <a:bodyPr rtlCol="0" anchor="ctr"/>
+          <a:lstStyle/>
+          <a:p>
+            <a:pPr algn="ctr"/>
+            <a:endParaRPr lang="ko-KR" altLang="en-US"/>
+          </a:p>
+        </p:txBody>
+      </p:sp>
+      <p:sp>
+        <p:nvSpPr>
+          <p:cNvPr id="1072" name="육각형 1071">
+            <a:extLst>
+              <a:ext uri="{FF2B5EF4-FFF2-40B4-BE49-F238E27FC236}">
+                <a16:creationId xmlns:a16="http://schemas.microsoft.com/office/drawing/2014/main" id="{8C880F8B-4ADF-B490-45C2-B115F808F045}"/>
+              </a:ext>
+            </a:extLst>
+          </p:cNvPr>
+          <p:cNvSpPr/>
+          <p:nvPr/>
+        </p:nvSpPr>
+        <p:spPr>
+          <a:xfrm>
+            <a:off x="2283460" y="1201420"/>
+            <a:ext cx="5726005" cy="355811"/>
+          </a:xfrm>
+          <a:prstGeom prst="hexagon">
+            <a:avLst>
+              <a:gd name="adj" fmla="val 18575"/>
+              <a:gd name="vf" fmla="val 115470"/>
+            </a:avLst>
+          </a:prstGeom>
+          <a:noFill/>
+          <a:ln>
+            <a:solidFill>
+              <a:schemeClr val="bg1"/>
+            </a:solidFill>
+          </a:ln>
+        </p:spPr>
+        <p:style>
+          <a:lnRef idx="2">
+            <a:schemeClr val="accent1">
+              <a:shade val="15000"/>
+            </a:schemeClr>
+          </a:lnRef>
+          <a:fillRef idx="1">
+            <a:schemeClr val="accent1"/>
+          </a:fillRef>
+          <a:effectRef idx="0">
+            <a:schemeClr val="accent1"/>
+          </a:effectRef>
+          <a:fontRef idx="minor">
+            <a:schemeClr val="lt1"/>
+          </a:fontRef>
+        </p:style>
+        <p:txBody>
+          <a:bodyPr rtlCol="0" anchor="ctr"/>
+          <a:lstStyle/>
+          <a:p>
+            <a:pPr algn="ctr"/>
+            <a:endParaRPr lang="ko-KR" altLang="en-US"/>
+          </a:p>
+        </p:txBody>
+      </p:sp>
+      <p:sp>
+        <p:nvSpPr>
+          <p:cNvPr id="1077" name="타원 1076">
+            <a:extLst>
+              <a:ext uri="{FF2B5EF4-FFF2-40B4-BE49-F238E27FC236}">
+                <a16:creationId xmlns:a16="http://schemas.microsoft.com/office/drawing/2014/main" id="{4BF08371-A3AA-B38D-A804-5AFF8E362027}"/>
+              </a:ext>
+            </a:extLst>
+          </p:cNvPr>
+          <p:cNvSpPr/>
+          <p:nvPr/>
+        </p:nvSpPr>
+        <p:spPr>
+          <a:xfrm>
+            <a:off x="2374265" y="1559136"/>
+            <a:ext cx="108000" cy="108000"/>
+          </a:xfrm>
+          <a:prstGeom prst="ellipse">
+            <a:avLst/>
+          </a:prstGeom>
+          <a:noFill/>
+          <a:ln w="12700">
+            <a:solidFill>
+              <a:schemeClr val="bg1"/>
+            </a:solidFill>
+          </a:ln>
+        </p:spPr>
+        <p:style>
+          <a:lnRef idx="2">
+            <a:schemeClr val="accent1">
+              <a:shade val="15000"/>
+            </a:schemeClr>
+          </a:lnRef>
+          <a:fillRef idx="1">
+            <a:schemeClr val="accent1"/>
+          </a:fillRef>
+          <a:effectRef idx="0">
+            <a:schemeClr val="accent1"/>
+          </a:effectRef>
+          <a:fontRef idx="minor">
+            <a:schemeClr val="lt1"/>
+          </a:fontRef>
+        </p:style>
+        <p:txBody>
+          <a:bodyPr rtlCol="0" anchor="ctr"/>
+          <a:lstStyle/>
+          <a:p>
+            <a:pPr algn="ctr"/>
+            <a:endParaRPr lang="ko-KR" altLang="en-US"/>
+          </a:p>
+        </p:txBody>
+      </p:sp>
+      <p:sp>
+        <p:nvSpPr>
+          <p:cNvPr id="1078" name="타원 1077">
+            <a:extLst>
+              <a:ext uri="{FF2B5EF4-FFF2-40B4-BE49-F238E27FC236}">
+                <a16:creationId xmlns:a16="http://schemas.microsoft.com/office/drawing/2014/main" id="{D16D544E-284E-4DCC-23A1-0C4382BA3AB8}"/>
+              </a:ext>
+            </a:extLst>
+          </p:cNvPr>
+          <p:cNvSpPr/>
+          <p:nvPr/>
+        </p:nvSpPr>
+        <p:spPr>
+          <a:xfrm>
+            <a:off x="2729547" y="1559136"/>
+            <a:ext cx="108000" cy="108000"/>
+          </a:xfrm>
+          <a:prstGeom prst="ellipse">
+            <a:avLst/>
+          </a:prstGeom>
+          <a:noFill/>
+          <a:ln w="12700">
+            <a:solidFill>
+              <a:schemeClr val="bg1"/>
+            </a:solidFill>
+          </a:ln>
+        </p:spPr>
+        <p:style>
+          <a:lnRef idx="2">
+            <a:schemeClr val="accent1">
+              <a:shade val="15000"/>
+            </a:schemeClr>
+          </a:lnRef>
+          <a:fillRef idx="1">
+            <a:schemeClr val="accent1"/>
+          </a:fillRef>
+          <a:effectRef idx="0">
+            <a:schemeClr val="accent1"/>
+          </a:effectRef>
+          <a:fontRef idx="minor">
+            <a:schemeClr val="lt1"/>
+          </a:fontRef>
+        </p:style>
+        <p:txBody>
+          <a:bodyPr rtlCol="0" anchor="ctr"/>
+          <a:lstStyle/>
+          <a:p>
+            <a:pPr algn="ctr"/>
+            <a:endParaRPr lang="ko-KR" altLang="en-US"/>
+          </a:p>
+        </p:txBody>
+      </p:sp>
+      <p:sp>
+        <p:nvSpPr>
+          <p:cNvPr id="1079" name="타원 1078">
+            <a:extLst>
+              <a:ext uri="{FF2B5EF4-FFF2-40B4-BE49-F238E27FC236}">
+                <a16:creationId xmlns:a16="http://schemas.microsoft.com/office/drawing/2014/main" id="{93C06AD0-B62A-4413-F30B-CD5195334BEB}"/>
+              </a:ext>
+            </a:extLst>
+          </p:cNvPr>
+          <p:cNvSpPr/>
+          <p:nvPr/>
+        </p:nvSpPr>
+        <p:spPr>
+          <a:xfrm>
+            <a:off x="2910840" y="1560355"/>
+            <a:ext cx="108000" cy="108000"/>
+          </a:xfrm>
+          <a:prstGeom prst="ellipse">
+            <a:avLst/>
+          </a:prstGeom>
+          <a:noFill/>
+          <a:ln w="12700">
+            <a:solidFill>
+              <a:schemeClr val="bg1"/>
+            </a:solidFill>
+          </a:ln>
+        </p:spPr>
+        <p:style>
+          <a:lnRef idx="2">
+            <a:schemeClr val="accent1">
+              <a:shade val="15000"/>
+            </a:schemeClr>
+          </a:lnRef>
+          <a:fillRef idx="1">
+            <a:schemeClr val="accent1"/>
+          </a:fillRef>
+          <a:effectRef idx="0">
+            <a:schemeClr val="accent1"/>
+          </a:effectRef>
+          <a:fontRef idx="minor">
+            <a:schemeClr val="lt1"/>
+          </a:fontRef>
+        </p:style>
+        <p:txBody>
+          <a:bodyPr rtlCol="0" anchor="ctr"/>
+          <a:lstStyle/>
+          <a:p>
+            <a:pPr algn="ctr"/>
+            <a:endParaRPr lang="ko-KR" altLang="en-US"/>
+          </a:p>
+        </p:txBody>
+      </p:sp>
+      <p:sp>
+        <p:nvSpPr>
+          <p:cNvPr id="1080" name="타원 1079">
+            <a:extLst>
+              <a:ext uri="{FF2B5EF4-FFF2-40B4-BE49-F238E27FC236}">
+                <a16:creationId xmlns:a16="http://schemas.microsoft.com/office/drawing/2014/main" id="{02BAA941-B41E-2113-C484-FDD2E820C2B4}"/>
+              </a:ext>
+            </a:extLst>
+          </p:cNvPr>
+          <p:cNvSpPr/>
+          <p:nvPr/>
+        </p:nvSpPr>
+        <p:spPr>
+          <a:xfrm>
+            <a:off x="3289935" y="1559136"/>
+            <a:ext cx="108000" cy="108000"/>
+          </a:xfrm>
+          <a:prstGeom prst="ellipse">
+            <a:avLst/>
+          </a:prstGeom>
+          <a:noFill/>
+          <a:ln w="12700">
+            <a:solidFill>
+              <a:schemeClr val="bg1"/>
+            </a:solidFill>
+          </a:ln>
+        </p:spPr>
+        <p:style>
+          <a:lnRef idx="2">
+            <a:schemeClr val="accent1">
+              <a:shade val="15000"/>
+            </a:schemeClr>
+          </a:lnRef>
+          <a:fillRef idx="1">
+            <a:schemeClr val="accent1"/>
+          </a:fillRef>
+          <a:effectRef idx="0">
+            <a:schemeClr val="accent1"/>
+          </a:effectRef>
+          <a:fontRef idx="minor">
+            <a:schemeClr val="lt1"/>
+          </a:fontRef>
+        </p:style>
+        <p:txBody>
+          <a:bodyPr rtlCol="0" anchor="ctr"/>
+          <a:lstStyle/>
+          <a:p>
+            <a:pPr algn="ctr"/>
+            <a:endParaRPr lang="ko-KR" altLang="en-US"/>
+          </a:p>
+        </p:txBody>
+      </p:sp>
+      <p:sp>
+        <p:nvSpPr>
+          <p:cNvPr id="1084" name="타원 1083">
+            <a:extLst>
+              <a:ext uri="{FF2B5EF4-FFF2-40B4-BE49-F238E27FC236}">
+                <a16:creationId xmlns:a16="http://schemas.microsoft.com/office/drawing/2014/main" id="{255FFF7B-6C23-8A0E-C04C-32077CACD3E8}"/>
+              </a:ext>
+            </a:extLst>
+          </p:cNvPr>
+          <p:cNvSpPr/>
+          <p:nvPr/>
+        </p:nvSpPr>
+        <p:spPr>
+          <a:xfrm>
+            <a:off x="3482975" y="1558450"/>
+            <a:ext cx="108000" cy="108000"/>
+          </a:xfrm>
+          <a:prstGeom prst="ellipse">
+            <a:avLst/>
+          </a:prstGeom>
+          <a:noFill/>
+          <a:ln w="12700">
+            <a:solidFill>
+              <a:schemeClr val="bg1"/>
+            </a:solidFill>
+          </a:ln>
+        </p:spPr>
+        <p:style>
+          <a:lnRef idx="2">
+            <a:schemeClr val="accent1">
+              <a:shade val="15000"/>
+            </a:schemeClr>
+          </a:lnRef>
+          <a:fillRef idx="1">
+            <a:schemeClr val="accent1"/>
+          </a:fillRef>
+          <a:effectRef idx="0">
+            <a:schemeClr val="accent1"/>
+          </a:effectRef>
+          <a:fontRef idx="minor">
+            <a:schemeClr val="lt1"/>
+          </a:fontRef>
+        </p:style>
+        <p:txBody>
+          <a:bodyPr rtlCol="0" anchor="ctr"/>
+          <a:lstStyle/>
+          <a:p>
+            <a:pPr algn="ctr"/>
+            <a:endParaRPr lang="ko-KR" altLang="en-US"/>
+          </a:p>
+        </p:txBody>
+      </p:sp>
+      <p:sp>
+        <p:nvSpPr>
+          <p:cNvPr id="1085" name="타원 1084">
+            <a:extLst>
+              <a:ext uri="{FF2B5EF4-FFF2-40B4-BE49-F238E27FC236}">
+                <a16:creationId xmlns:a16="http://schemas.microsoft.com/office/drawing/2014/main" id="{DF66028D-AC19-4F92-71C0-D24CBA0216E5}"/>
+              </a:ext>
+            </a:extLst>
+          </p:cNvPr>
+          <p:cNvSpPr/>
+          <p:nvPr/>
+        </p:nvSpPr>
+        <p:spPr>
+          <a:xfrm>
+            <a:off x="3862070" y="1559136"/>
+            <a:ext cx="108000" cy="108000"/>
+          </a:xfrm>
+          <a:prstGeom prst="ellipse">
+            <a:avLst/>
+          </a:prstGeom>
+          <a:noFill/>
+          <a:ln w="12700">
+            <a:solidFill>
+              <a:schemeClr val="bg1"/>
+            </a:solidFill>
+          </a:ln>
+        </p:spPr>
+        <p:style>
+          <a:lnRef idx="2">
+            <a:schemeClr val="accent1">
+              <a:shade val="15000"/>
+            </a:schemeClr>
+          </a:lnRef>
+          <a:fillRef idx="1">
+            <a:schemeClr val="accent1"/>
+          </a:fillRef>
+          <a:effectRef idx="0">
+            <a:schemeClr val="accent1"/>
+          </a:effectRef>
+          <a:fontRef idx="minor">
+            <a:schemeClr val="lt1"/>
+          </a:fontRef>
+        </p:style>
+        <p:txBody>
+          <a:bodyPr rtlCol="0" anchor="ctr"/>
+          <a:lstStyle/>
+          <a:p>
+            <a:pPr algn="ctr"/>
+            <a:endParaRPr lang="ko-KR" altLang="en-US"/>
+          </a:p>
+        </p:txBody>
+      </p:sp>
+      <p:sp>
+        <p:nvSpPr>
+          <p:cNvPr id="1088" name="타원 1087">
+            <a:extLst>
+              <a:ext uri="{FF2B5EF4-FFF2-40B4-BE49-F238E27FC236}">
+                <a16:creationId xmlns:a16="http://schemas.microsoft.com/office/drawing/2014/main" id="{E769A2E8-0E3A-4A7F-4C85-552317EFD9A6}"/>
+              </a:ext>
+            </a:extLst>
+          </p:cNvPr>
+          <p:cNvSpPr/>
+          <p:nvPr/>
+        </p:nvSpPr>
+        <p:spPr>
+          <a:xfrm>
+            <a:off x="4055110" y="1558450"/>
+            <a:ext cx="108000" cy="108000"/>
+          </a:xfrm>
+          <a:prstGeom prst="ellipse">
+            <a:avLst/>
+          </a:prstGeom>
+          <a:noFill/>
+          <a:ln w="12700">
+            <a:solidFill>
+              <a:schemeClr val="bg1"/>
+            </a:solidFill>
+          </a:ln>
+        </p:spPr>
+        <p:style>
+          <a:lnRef idx="2">
+            <a:schemeClr val="accent1">
+              <a:shade val="15000"/>
+            </a:schemeClr>
+          </a:lnRef>
+          <a:fillRef idx="1">
+            <a:schemeClr val="accent1"/>
+          </a:fillRef>
+          <a:effectRef idx="0">
+            <a:schemeClr val="accent1"/>
+          </a:effectRef>
+          <a:fontRef idx="minor">
+            <a:schemeClr val="lt1"/>
+          </a:fontRef>
+        </p:style>
+        <p:txBody>
+          <a:bodyPr rtlCol="0" anchor="ctr"/>
+          <a:lstStyle/>
+          <a:p>
+            <a:pPr algn="ctr"/>
+            <a:endParaRPr lang="ko-KR" altLang="en-US"/>
+          </a:p>
+        </p:txBody>
+      </p:sp>
+      <p:sp>
+        <p:nvSpPr>
+          <p:cNvPr id="1089" name="타원 1088">
+            <a:extLst>
+              <a:ext uri="{FF2B5EF4-FFF2-40B4-BE49-F238E27FC236}">
+                <a16:creationId xmlns:a16="http://schemas.microsoft.com/office/drawing/2014/main" id="{311805C9-A89E-5AF2-7DE5-F68A2B8AFF5D}"/>
+              </a:ext>
+            </a:extLst>
+          </p:cNvPr>
+          <p:cNvSpPr/>
+          <p:nvPr/>
+        </p:nvSpPr>
+        <p:spPr>
+          <a:xfrm>
+            <a:off x="4434205" y="1559136"/>
+            <a:ext cx="108000" cy="108000"/>
+          </a:xfrm>
+          <a:prstGeom prst="ellipse">
+            <a:avLst/>
+          </a:prstGeom>
+          <a:noFill/>
+          <a:ln w="12700">
+            <a:solidFill>
+              <a:schemeClr val="bg1"/>
+            </a:solidFill>
+          </a:ln>
+        </p:spPr>
+        <p:style>
+          <a:lnRef idx="2">
+            <a:schemeClr val="accent1">
+              <a:shade val="15000"/>
+            </a:schemeClr>
+          </a:lnRef>
+          <a:fillRef idx="1">
+            <a:schemeClr val="accent1"/>
+          </a:fillRef>
+          <a:effectRef idx="0">
+            <a:schemeClr val="accent1"/>
+          </a:effectRef>
+          <a:fontRef idx="minor">
+            <a:schemeClr val="lt1"/>
+          </a:fontRef>
+        </p:style>
+        <p:txBody>
+          <a:bodyPr rtlCol="0" anchor="ctr"/>
+          <a:lstStyle/>
+          <a:p>
+            <a:pPr algn="ctr"/>
+            <a:endParaRPr lang="ko-KR" altLang="en-US"/>
+          </a:p>
+        </p:txBody>
+      </p:sp>
+      <p:sp>
+        <p:nvSpPr>
+          <p:cNvPr id="1092" name="타원 1091">
+            <a:extLst>
+              <a:ext uri="{FF2B5EF4-FFF2-40B4-BE49-F238E27FC236}">
+                <a16:creationId xmlns:a16="http://schemas.microsoft.com/office/drawing/2014/main" id="{5F045897-FDB8-C8A3-6301-09D5165462C4}"/>
+              </a:ext>
+            </a:extLst>
+          </p:cNvPr>
+          <p:cNvSpPr/>
+          <p:nvPr/>
+        </p:nvSpPr>
+        <p:spPr>
+          <a:xfrm>
+            <a:off x="4626853" y="1558713"/>
+            <a:ext cx="108000" cy="108000"/>
+          </a:xfrm>
+          <a:prstGeom prst="ellipse">
+            <a:avLst/>
+          </a:prstGeom>
+          <a:noFill/>
+          <a:ln w="12700">
+            <a:solidFill>
+              <a:schemeClr val="bg1"/>
+            </a:solidFill>
+          </a:ln>
+        </p:spPr>
+        <p:style>
+          <a:lnRef idx="2">
+            <a:schemeClr val="accent1">
+              <a:shade val="15000"/>
+            </a:schemeClr>
+          </a:lnRef>
+          <a:fillRef idx="1">
+            <a:schemeClr val="accent1"/>
+          </a:fillRef>
+          <a:effectRef idx="0">
+            <a:schemeClr val="accent1"/>
+          </a:effectRef>
+          <a:fontRef idx="minor">
+            <a:schemeClr val="lt1"/>
+          </a:fontRef>
+        </p:style>
+        <p:txBody>
+          <a:bodyPr rtlCol="0" anchor="ctr"/>
+          <a:lstStyle/>
+          <a:p>
+            <a:pPr algn="ctr"/>
+            <a:endParaRPr lang="ko-KR" altLang="en-US"/>
+          </a:p>
+        </p:txBody>
+      </p:sp>
+      <p:sp>
+        <p:nvSpPr>
+          <p:cNvPr id="1093" name="타원 1092">
+            <a:extLst>
+              <a:ext uri="{FF2B5EF4-FFF2-40B4-BE49-F238E27FC236}">
+                <a16:creationId xmlns:a16="http://schemas.microsoft.com/office/drawing/2014/main" id="{43129E76-AD29-521B-A87E-FE83A707C7BA}"/>
+              </a:ext>
+            </a:extLst>
+          </p:cNvPr>
+          <p:cNvSpPr/>
+          <p:nvPr/>
+        </p:nvSpPr>
+        <p:spPr>
+          <a:xfrm>
+            <a:off x="5005948" y="1557494"/>
+            <a:ext cx="108000" cy="108000"/>
+          </a:xfrm>
+          <a:prstGeom prst="ellipse">
+            <a:avLst/>
+          </a:prstGeom>
+          <a:noFill/>
+          <a:ln w="12700">
+            <a:solidFill>
+              <a:schemeClr val="bg1"/>
+            </a:solidFill>
+          </a:ln>
+        </p:spPr>
+        <p:style>
+          <a:lnRef idx="2">
+            <a:schemeClr val="accent1">
+              <a:shade val="15000"/>
+            </a:schemeClr>
+          </a:lnRef>
+          <a:fillRef idx="1">
+            <a:schemeClr val="accent1"/>
+          </a:fillRef>
+          <a:effectRef idx="0">
+            <a:schemeClr val="accent1"/>
+          </a:effectRef>
+          <a:fontRef idx="minor">
+            <a:schemeClr val="lt1"/>
+          </a:fontRef>
+        </p:style>
+        <p:txBody>
+          <a:bodyPr rtlCol="0" anchor="ctr"/>
+          <a:lstStyle/>
+          <a:p>
+            <a:pPr algn="ctr"/>
+            <a:endParaRPr lang="ko-KR" altLang="en-US"/>
+          </a:p>
+        </p:txBody>
+      </p:sp>
+      <p:sp>
+        <p:nvSpPr>
+          <p:cNvPr id="1094" name="타원 1093">
+            <a:extLst>
+              <a:ext uri="{FF2B5EF4-FFF2-40B4-BE49-F238E27FC236}">
+                <a16:creationId xmlns:a16="http://schemas.microsoft.com/office/drawing/2014/main" id="{B9B2B40E-6DF0-3D26-FB16-53F8E3F28D5B}"/>
+              </a:ext>
+            </a:extLst>
+          </p:cNvPr>
+          <p:cNvSpPr/>
+          <p:nvPr/>
+        </p:nvSpPr>
+        <p:spPr>
+          <a:xfrm>
+            <a:off x="5198988" y="1556808"/>
+            <a:ext cx="108000" cy="108000"/>
+          </a:xfrm>
+          <a:prstGeom prst="ellipse">
+            <a:avLst/>
+          </a:prstGeom>
+          <a:noFill/>
+          <a:ln w="12700">
+            <a:solidFill>
+              <a:schemeClr val="bg1"/>
+            </a:solidFill>
+          </a:ln>
+        </p:spPr>
+        <p:style>
+          <a:lnRef idx="2">
+            <a:schemeClr val="accent1">
+              <a:shade val="15000"/>
+            </a:schemeClr>
+          </a:lnRef>
+          <a:fillRef idx="1">
+            <a:schemeClr val="accent1"/>
+          </a:fillRef>
+          <a:effectRef idx="0">
+            <a:schemeClr val="accent1"/>
+          </a:effectRef>
+          <a:fontRef idx="minor">
+            <a:schemeClr val="lt1"/>
+          </a:fontRef>
+        </p:style>
+        <p:txBody>
+          <a:bodyPr rtlCol="0" anchor="ctr"/>
+          <a:lstStyle/>
+          <a:p>
+            <a:pPr algn="ctr"/>
+            <a:endParaRPr lang="ko-KR" altLang="en-US"/>
+          </a:p>
+        </p:txBody>
+      </p:sp>
+      <p:sp>
+        <p:nvSpPr>
+          <p:cNvPr id="1095" name="타원 1094">
+            <a:extLst>
+              <a:ext uri="{FF2B5EF4-FFF2-40B4-BE49-F238E27FC236}">
+                <a16:creationId xmlns:a16="http://schemas.microsoft.com/office/drawing/2014/main" id="{EEEC38BB-6B13-0E34-862E-9BAFC100805C}"/>
+              </a:ext>
+            </a:extLst>
+          </p:cNvPr>
+          <p:cNvSpPr/>
+          <p:nvPr/>
+        </p:nvSpPr>
+        <p:spPr>
+          <a:xfrm>
+            <a:off x="5578083" y="1557494"/>
+            <a:ext cx="108000" cy="108000"/>
+          </a:xfrm>
+          <a:prstGeom prst="ellipse">
+            <a:avLst/>
+          </a:prstGeom>
+          <a:noFill/>
+          <a:ln w="12700">
+            <a:solidFill>
+              <a:schemeClr val="bg1"/>
+            </a:solidFill>
+          </a:ln>
+        </p:spPr>
+        <p:style>
+          <a:lnRef idx="2">
+            <a:schemeClr val="accent1">
+              <a:shade val="15000"/>
+            </a:schemeClr>
+          </a:lnRef>
+          <a:fillRef idx="1">
+            <a:schemeClr val="accent1"/>
+          </a:fillRef>
+          <a:effectRef idx="0">
+            <a:schemeClr val="accent1"/>
+          </a:effectRef>
+          <a:fontRef idx="minor">
+            <a:schemeClr val="lt1"/>
+          </a:fontRef>
+        </p:style>
+        <p:txBody>
+          <a:bodyPr rtlCol="0" anchor="ctr"/>
+          <a:lstStyle/>
+          <a:p>
+            <a:pPr algn="ctr"/>
+            <a:endParaRPr lang="ko-KR" altLang="en-US"/>
+          </a:p>
+        </p:txBody>
+      </p:sp>
+      <p:sp>
+        <p:nvSpPr>
+          <p:cNvPr id="1098" name="타원 1097">
+            <a:extLst>
+              <a:ext uri="{FF2B5EF4-FFF2-40B4-BE49-F238E27FC236}">
+                <a16:creationId xmlns:a16="http://schemas.microsoft.com/office/drawing/2014/main" id="{D8AADE02-C940-E915-4DD5-E2B2452CE890}"/>
+              </a:ext>
+            </a:extLst>
+          </p:cNvPr>
+          <p:cNvSpPr/>
+          <p:nvPr/>
+        </p:nvSpPr>
+        <p:spPr>
+          <a:xfrm>
+            <a:off x="5770617" y="1558078"/>
+            <a:ext cx="108000" cy="108000"/>
+          </a:xfrm>
+          <a:prstGeom prst="ellipse">
+            <a:avLst/>
+          </a:prstGeom>
+          <a:noFill/>
+          <a:ln w="12700">
+            <a:solidFill>
+              <a:schemeClr val="bg1"/>
+            </a:solidFill>
+          </a:ln>
+        </p:spPr>
+        <p:style>
+          <a:lnRef idx="2">
+            <a:schemeClr val="accent1">
+              <a:shade val="15000"/>
+            </a:schemeClr>
+          </a:lnRef>
+          <a:fillRef idx="1">
+            <a:schemeClr val="accent1"/>
+          </a:fillRef>
+          <a:effectRef idx="0">
+            <a:schemeClr val="accent1"/>
+          </a:effectRef>
+          <a:fontRef idx="minor">
+            <a:schemeClr val="lt1"/>
+          </a:fontRef>
+        </p:style>
+        <p:txBody>
+          <a:bodyPr rtlCol="0" anchor="ctr"/>
+          <a:lstStyle/>
+          <a:p>
+            <a:pPr algn="ctr"/>
+            <a:endParaRPr lang="ko-KR" altLang="en-US"/>
+          </a:p>
+        </p:txBody>
+      </p:sp>
+      <p:sp>
+        <p:nvSpPr>
+          <p:cNvPr id="1099" name="타원 1098">
+            <a:extLst>
+              <a:ext uri="{FF2B5EF4-FFF2-40B4-BE49-F238E27FC236}">
+                <a16:creationId xmlns:a16="http://schemas.microsoft.com/office/drawing/2014/main" id="{D3D90C33-3E1B-1C02-CF7D-30E7217D1C34}"/>
+              </a:ext>
+            </a:extLst>
+          </p:cNvPr>
+          <p:cNvSpPr/>
+          <p:nvPr/>
+        </p:nvSpPr>
+        <p:spPr>
+          <a:xfrm>
+            <a:off x="6149712" y="1556859"/>
+            <a:ext cx="108000" cy="108000"/>
+          </a:xfrm>
+          <a:prstGeom prst="ellipse">
+            <a:avLst/>
+          </a:prstGeom>
+          <a:noFill/>
+          <a:ln w="12700">
+            <a:solidFill>
+              <a:schemeClr val="bg1"/>
+            </a:solidFill>
+          </a:ln>
+        </p:spPr>
+        <p:style>
+          <a:lnRef idx="2">
+            <a:schemeClr val="accent1">
+              <a:shade val="15000"/>
+            </a:schemeClr>
+          </a:lnRef>
+          <a:fillRef idx="1">
+            <a:schemeClr val="accent1"/>
+          </a:fillRef>
+          <a:effectRef idx="0">
+            <a:schemeClr val="accent1"/>
+          </a:effectRef>
+          <a:fontRef idx="minor">
+            <a:schemeClr val="lt1"/>
+          </a:fontRef>
+        </p:style>
+        <p:txBody>
+          <a:bodyPr rtlCol="0" anchor="ctr"/>
+          <a:lstStyle/>
+          <a:p>
+            <a:pPr algn="ctr"/>
+            <a:endParaRPr lang="ko-KR" altLang="en-US"/>
+          </a:p>
+        </p:txBody>
+      </p:sp>
+      <p:sp>
+        <p:nvSpPr>
+          <p:cNvPr id="1102" name="타원 1101">
+            <a:extLst>
+              <a:ext uri="{FF2B5EF4-FFF2-40B4-BE49-F238E27FC236}">
+                <a16:creationId xmlns:a16="http://schemas.microsoft.com/office/drawing/2014/main" id="{DBA02242-E645-517D-EA63-5134A6667DBD}"/>
+              </a:ext>
+            </a:extLst>
+          </p:cNvPr>
+          <p:cNvSpPr/>
+          <p:nvPr/>
+        </p:nvSpPr>
+        <p:spPr>
+          <a:xfrm>
+            <a:off x="6329655" y="1556173"/>
+            <a:ext cx="108000" cy="108000"/>
+          </a:xfrm>
+          <a:prstGeom prst="ellipse">
+            <a:avLst/>
+          </a:prstGeom>
+          <a:noFill/>
+          <a:ln w="12700">
+            <a:solidFill>
+              <a:schemeClr val="bg1"/>
+            </a:solidFill>
+          </a:ln>
+        </p:spPr>
+        <p:style>
+          <a:lnRef idx="2">
+            <a:schemeClr val="accent1">
+              <a:shade val="15000"/>
+            </a:schemeClr>
+          </a:lnRef>
+          <a:fillRef idx="1">
+            <a:schemeClr val="accent1"/>
+          </a:fillRef>
+          <a:effectRef idx="0">
+            <a:schemeClr val="accent1"/>
+          </a:effectRef>
+          <a:fontRef idx="minor">
+            <a:schemeClr val="lt1"/>
+          </a:fontRef>
+        </p:style>
+        <p:txBody>
+          <a:bodyPr rtlCol="0" anchor="ctr"/>
+          <a:lstStyle/>
+          <a:p>
+            <a:pPr algn="ctr"/>
+            <a:endParaRPr lang="ko-KR" altLang="en-US"/>
+          </a:p>
+        </p:txBody>
+      </p:sp>
+      <p:sp>
+        <p:nvSpPr>
+          <p:cNvPr id="1103" name="타원 1102">
+            <a:extLst>
+              <a:ext uri="{FF2B5EF4-FFF2-40B4-BE49-F238E27FC236}">
+                <a16:creationId xmlns:a16="http://schemas.microsoft.com/office/drawing/2014/main" id="{DA535550-01B0-96A3-07CC-5A321B92D13E}"/>
+              </a:ext>
+            </a:extLst>
+          </p:cNvPr>
+          <p:cNvSpPr/>
+          <p:nvPr/>
+        </p:nvSpPr>
+        <p:spPr>
+          <a:xfrm>
+            <a:off x="6708750" y="1554954"/>
+            <a:ext cx="108000" cy="108000"/>
+          </a:xfrm>
+          <a:prstGeom prst="ellipse">
+            <a:avLst/>
+          </a:prstGeom>
+          <a:noFill/>
+          <a:ln w="12700">
+            <a:solidFill>
+              <a:schemeClr val="bg1"/>
+            </a:solidFill>
+          </a:ln>
+        </p:spPr>
+        <p:style>
+          <a:lnRef idx="2">
+            <a:schemeClr val="accent1">
+              <a:shade val="15000"/>
+            </a:schemeClr>
+          </a:lnRef>
+          <a:fillRef idx="1">
+            <a:schemeClr val="accent1"/>
+          </a:fillRef>
+          <a:effectRef idx="0">
+            <a:schemeClr val="accent1"/>
+          </a:effectRef>
+          <a:fontRef idx="minor">
+            <a:schemeClr val="lt1"/>
+          </a:fontRef>
+        </p:style>
+        <p:txBody>
+          <a:bodyPr rtlCol="0" anchor="ctr"/>
+          <a:lstStyle/>
+          <a:p>
+            <a:pPr algn="ctr"/>
+            <a:endParaRPr lang="ko-KR" altLang="en-US"/>
+          </a:p>
+        </p:txBody>
+      </p:sp>
+      <p:sp>
+        <p:nvSpPr>
+          <p:cNvPr id="1104" name="타원 1103">
+            <a:extLst>
+              <a:ext uri="{FF2B5EF4-FFF2-40B4-BE49-F238E27FC236}">
+                <a16:creationId xmlns:a16="http://schemas.microsoft.com/office/drawing/2014/main" id="{981AD867-F54C-856F-F77E-BB4ADA33D2A7}"/>
+              </a:ext>
+            </a:extLst>
+          </p:cNvPr>
+          <p:cNvSpPr/>
+          <p:nvPr/>
+        </p:nvSpPr>
+        <p:spPr>
+          <a:xfrm>
+            <a:off x="6901790" y="1556173"/>
+            <a:ext cx="108000" cy="108000"/>
+          </a:xfrm>
+          <a:prstGeom prst="ellipse">
+            <a:avLst/>
+          </a:prstGeom>
+          <a:noFill/>
+          <a:ln w="12700">
+            <a:solidFill>
+              <a:schemeClr val="bg1"/>
+            </a:solidFill>
+          </a:ln>
+        </p:spPr>
+        <p:style>
+          <a:lnRef idx="2">
+            <a:schemeClr val="accent1">
+              <a:shade val="15000"/>
+            </a:schemeClr>
+          </a:lnRef>
+          <a:fillRef idx="1">
+            <a:schemeClr val="accent1"/>
+          </a:fillRef>
+          <a:effectRef idx="0">
+            <a:schemeClr val="accent1"/>
+          </a:effectRef>
+          <a:fontRef idx="minor">
+            <a:schemeClr val="lt1"/>
+          </a:fontRef>
+        </p:style>
+        <p:txBody>
+          <a:bodyPr rtlCol="0" anchor="ctr"/>
+          <a:lstStyle/>
+          <a:p>
+            <a:pPr algn="ctr"/>
+            <a:endParaRPr lang="ko-KR" altLang="en-US"/>
+          </a:p>
+        </p:txBody>
+      </p:sp>
+      <p:sp>
+        <p:nvSpPr>
+          <p:cNvPr id="1105" name="타원 1104">
+            <a:extLst>
+              <a:ext uri="{FF2B5EF4-FFF2-40B4-BE49-F238E27FC236}">
+                <a16:creationId xmlns:a16="http://schemas.microsoft.com/office/drawing/2014/main" id="{0F9D6884-684A-897B-1A6E-5DB123138064}"/>
+              </a:ext>
+            </a:extLst>
+          </p:cNvPr>
+          <p:cNvSpPr/>
+          <p:nvPr/>
+        </p:nvSpPr>
+        <p:spPr>
+          <a:xfrm>
+            <a:off x="7280885" y="1554954"/>
+            <a:ext cx="108000" cy="108000"/>
+          </a:xfrm>
+          <a:prstGeom prst="ellipse">
+            <a:avLst/>
+          </a:prstGeom>
+          <a:noFill/>
+          <a:ln w="12700">
+            <a:solidFill>
+              <a:schemeClr val="bg1"/>
+            </a:solidFill>
+          </a:ln>
+        </p:spPr>
+        <p:style>
+          <a:lnRef idx="2">
+            <a:schemeClr val="accent1">
+              <a:shade val="15000"/>
+            </a:schemeClr>
+          </a:lnRef>
+          <a:fillRef idx="1">
+            <a:schemeClr val="accent1"/>
+          </a:fillRef>
+          <a:effectRef idx="0">
+            <a:schemeClr val="accent1"/>
+          </a:effectRef>
+          <a:fontRef idx="minor">
+            <a:schemeClr val="lt1"/>
+          </a:fontRef>
+        </p:style>
+        <p:txBody>
+          <a:bodyPr rtlCol="0" anchor="ctr"/>
+          <a:lstStyle/>
+          <a:p>
+            <a:pPr algn="ctr"/>
+            <a:endParaRPr lang="ko-KR" altLang="en-US"/>
+          </a:p>
+        </p:txBody>
+      </p:sp>
+      <p:sp>
+        <p:nvSpPr>
+          <p:cNvPr id="1106" name="타원 1105">
+            <a:extLst>
+              <a:ext uri="{FF2B5EF4-FFF2-40B4-BE49-F238E27FC236}">
+                <a16:creationId xmlns:a16="http://schemas.microsoft.com/office/drawing/2014/main" id="{BFAEB5C2-A0B5-DCA1-B1FE-6AC489D936CA}"/>
+              </a:ext>
+            </a:extLst>
+          </p:cNvPr>
+          <p:cNvSpPr/>
+          <p:nvPr/>
+        </p:nvSpPr>
+        <p:spPr>
+          <a:xfrm>
+            <a:off x="7473925" y="1554268"/>
+            <a:ext cx="108000" cy="108000"/>
+          </a:xfrm>
+          <a:prstGeom prst="ellipse">
+            <a:avLst/>
+          </a:prstGeom>
+          <a:noFill/>
+          <a:ln w="12700">
+            <a:solidFill>
+              <a:schemeClr val="bg1"/>
+            </a:solidFill>
+          </a:ln>
+        </p:spPr>
+        <p:style>
+          <a:lnRef idx="2">
+            <a:schemeClr val="accent1">
+              <a:shade val="15000"/>
+            </a:schemeClr>
+          </a:lnRef>
+          <a:fillRef idx="1">
+            <a:schemeClr val="accent1"/>
+          </a:fillRef>
+          <a:effectRef idx="0">
+            <a:schemeClr val="accent1"/>
+          </a:effectRef>
+          <a:fontRef idx="minor">
+            <a:schemeClr val="lt1"/>
+          </a:fontRef>
+        </p:style>
+        <p:txBody>
+          <a:bodyPr rtlCol="0" anchor="ctr"/>
+          <a:lstStyle/>
+          <a:p>
+            <a:pPr algn="ctr"/>
+            <a:endParaRPr lang="ko-KR" altLang="en-US"/>
+          </a:p>
+        </p:txBody>
+      </p:sp>
+      <p:sp>
+        <p:nvSpPr>
+          <p:cNvPr id="1107" name="타원 1106">
+            <a:extLst>
+              <a:ext uri="{FF2B5EF4-FFF2-40B4-BE49-F238E27FC236}">
+                <a16:creationId xmlns:a16="http://schemas.microsoft.com/office/drawing/2014/main" id="{82ACB7B9-6E5C-457F-96BF-E00DB787C8D4}"/>
+              </a:ext>
+            </a:extLst>
+          </p:cNvPr>
+          <p:cNvSpPr/>
+          <p:nvPr/>
+        </p:nvSpPr>
+        <p:spPr>
+          <a:xfrm>
+            <a:off x="7786980" y="1554954"/>
+            <a:ext cx="108000" cy="108000"/>
+          </a:xfrm>
+          <a:prstGeom prst="ellipse">
+            <a:avLst/>
+          </a:prstGeom>
+          <a:noFill/>
+          <a:ln w="12700">
             <a:solidFill>
               <a:schemeClr val="bg1"/>
             </a:solidFill>
@@ -14360,8 +15406,8 @@
         </p:nvCxnSpPr>
         <p:spPr>
           <a:xfrm>
-            <a:off x="0" y="1383792"/>
-            <a:ext cx="1932432" cy="0"/>
+            <a:off x="-330200" y="1383792"/>
+            <a:ext cx="2262632" cy="0"/>
           </a:xfrm>
           <a:prstGeom prst="line">
             <a:avLst/>
